--- a/media/resources/BirOrunduuOnduktar/Onduktar_KoboytuuJenilOrtoOOR.pptx
+++ b/media/resources/BirOrunduuOnduktar/Onduktar_KoboytuuJenilOrtoOOR.pptx
@@ -2034,7 +2034,7 @@
           <a:p>
             <a:r>
               <a:rPr lang="en-GB" sz="2000" dirty="0"/>
-              <a:t>2 × 0.3</a:t>
+              <a:t>2 × 0,3</a:t>
             </a:r>
           </a:p>
         </p:txBody>
@@ -2110,7 +2110,7 @@
           <a:p>
             <a:r>
               <a:rPr lang="en-GB" sz="2000" dirty="0"/>
-              <a:t>2 × 0.7</a:t>
+              <a:t>2 × 0,7</a:t>
             </a:r>
           </a:p>
         </p:txBody>
@@ -2186,7 +2186,7 @@
           <a:p>
             <a:r>
               <a:rPr lang="en-GB" sz="2000" dirty="0"/>
-              <a:t>3 × 0.7</a:t>
+              <a:t>3 × 0,7</a:t>
             </a:r>
           </a:p>
         </p:txBody>
@@ -2262,7 +2262,7 @@
           <a:p>
             <a:r>
               <a:rPr lang="en-GB" sz="2000" dirty="0"/>
-              <a:t>0.8 × 4</a:t>
+              <a:t>0,8 × 4</a:t>
             </a:r>
           </a:p>
         </p:txBody>
@@ -2338,7 +2338,7 @@
           <a:p>
             <a:r>
               <a:rPr lang="en-GB" sz="2000" dirty="0"/>
-              <a:t>1.1 × 6</a:t>
+              <a:t>1,1 × 6</a:t>
             </a:r>
           </a:p>
         </p:txBody>
@@ -2414,7 +2414,7 @@
           <a:p>
             <a:r>
               <a:rPr lang="en-GB" sz="2000" dirty="0"/>
-              <a:t>2.4 × 2</a:t>
+              <a:t>2,4 × 2</a:t>
             </a:r>
           </a:p>
         </p:txBody>
@@ -2490,7 +2490,7 @@
           <a:p>
             <a:r>
               <a:rPr lang="en-GB" sz="2000" dirty="0"/>
-              <a:t>3 × 2.6</a:t>
+              <a:t>3 × 2,6</a:t>
             </a:r>
           </a:p>
         </p:txBody>
@@ -2607,7 +2607,7 @@
           <a:p>
             <a:r>
               <a:rPr lang="en-GB" sz="2000" dirty="0"/>
-              <a:t>0.3 × 0.3</a:t>
+              <a:t>0,3 × 0,3</a:t>
             </a:r>
           </a:p>
         </p:txBody>
@@ -2683,7 +2683,7 @@
           <a:p>
             <a:r>
               <a:rPr lang="en-GB" sz="2000" dirty="0"/>
-              <a:t>0.5 × 0.7</a:t>
+              <a:t>0,5 × 0,7</a:t>
             </a:r>
           </a:p>
         </p:txBody>
@@ -2759,7 +2759,7 @@
           <a:p>
             <a:r>
               <a:rPr lang="en-GB" sz="2000" dirty="0"/>
-              <a:t>0.4 × 0.5</a:t>
+              <a:t>0,4 × 0,5</a:t>
             </a:r>
           </a:p>
         </p:txBody>
@@ -2835,7 +2835,7 @@
           <a:p>
             <a:r>
               <a:rPr lang="en-GB" sz="2000" dirty="0"/>
-              <a:t>1.2 × 0.3</a:t>
+              <a:t>1,2 × 0,3</a:t>
             </a:r>
           </a:p>
         </p:txBody>
@@ -2911,7 +2911,7 @@
           <a:p>
             <a:r>
               <a:rPr lang="en-GB" sz="2000" dirty="0"/>
-              <a:t>0.4 × 1.6</a:t>
+              <a:t>0,4 × 1,6</a:t>
             </a:r>
           </a:p>
         </p:txBody>
@@ -2987,7 +2987,7 @@
           <a:p>
             <a:r>
               <a:rPr lang="en-GB" sz="2000" dirty="0"/>
-              <a:t>1.2 × 1.3</a:t>
+              <a:t>1,2 × 1,3</a:t>
             </a:r>
           </a:p>
         </p:txBody>
@@ -3063,7 +3063,7 @@
           <a:p>
             <a:r>
               <a:rPr lang="en-GB" sz="2000" dirty="0"/>
-              <a:t>2.7 × 1.1</a:t>
+              <a:t>2,7 × 1,1</a:t>
             </a:r>
           </a:p>
         </p:txBody>
@@ -3180,7 +3180,7 @@
           <a:p>
             <a:r>
               <a:rPr lang="en-GB" sz="2000" dirty="0"/>
-              <a:t>1.2 × 0.7</a:t>
+              <a:t>1,2 × 0,7</a:t>
             </a:r>
           </a:p>
         </p:txBody>
@@ -3256,7 +3256,7 @@
           <a:p>
             <a:r>
               <a:rPr lang="en-GB" sz="2000" dirty="0"/>
-              <a:t>1.4 × 1.8</a:t>
+              <a:t>1,4 × 1,8</a:t>
             </a:r>
           </a:p>
         </p:txBody>
@@ -3332,7 +3332,7 @@
           <a:p>
             <a:r>
               <a:rPr lang="en-GB" sz="2000" dirty="0"/>
-              <a:t>0.2 × 0.16</a:t>
+              <a:t>0,2 × 0,16</a:t>
             </a:r>
           </a:p>
         </p:txBody>
@@ -3408,7 +3408,7 @@
           <a:p>
             <a:r>
               <a:rPr lang="en-GB" sz="2000" dirty="0"/>
-              <a:t>1.6 × 0.05</a:t>
+              <a:t>1,6 × 0,05</a:t>
             </a:r>
           </a:p>
         </p:txBody>
@@ -3484,7 +3484,7 @@
           <a:p>
             <a:r>
               <a:rPr lang="en-GB" sz="2000" dirty="0"/>
-              <a:t>2.2 × 0.15</a:t>
+              <a:t>2,2 × 0,15</a:t>
             </a:r>
           </a:p>
         </p:txBody>
@@ -3560,7 +3560,7 @@
           <a:p>
             <a:r>
               <a:rPr lang="en-GB" sz="2000" dirty="0"/>
-              <a:t>1.24 × 0.6</a:t>
+              <a:t>1,24 × 0,6</a:t>
             </a:r>
           </a:p>
         </p:txBody>
@@ -3636,7 +3636,7 @@
           <a:p>
             <a:r>
               <a:rPr lang="en-GB" sz="2000" dirty="0"/>
-              <a:t>2.21 × 3.5</a:t>
+              <a:t>2,21 × 3,5</a:t>
             </a:r>
           </a:p>
         </p:txBody>
@@ -4269,7 +4269,7 @@
           <a:p>
             <a:r>
               <a:rPr lang="en-GB" sz="2000" dirty="0"/>
-              <a:t>2 × 0.3</a:t>
+              <a:t>2 × 0,3</a:t>
             </a:r>
           </a:p>
         </p:txBody>
@@ -4312,7 +4312,7 @@
             <a:pPr algn="ctr"/>
             <a:r>
               <a:rPr lang="en-GB" sz="2000" dirty="0"/>
-              <a:t>0.6</a:t>
+              <a:t>0,6</a:t>
             </a:r>
           </a:p>
         </p:txBody>
@@ -4388,7 +4388,7 @@
           <a:p>
             <a:r>
               <a:rPr lang="en-GB" sz="2000" dirty="0"/>
-              <a:t>2 × 0.7</a:t>
+              <a:t>2 × 0,7</a:t>
             </a:r>
           </a:p>
         </p:txBody>
@@ -4431,7 +4431,7 @@
             <a:pPr algn="ctr"/>
             <a:r>
               <a:rPr lang="en-GB" sz="2000" dirty="0"/>
-              <a:t>1.4</a:t>
+              <a:t>1,4</a:t>
             </a:r>
           </a:p>
         </p:txBody>
@@ -4507,7 +4507,7 @@
           <a:p>
             <a:r>
               <a:rPr lang="en-GB" sz="2000" dirty="0"/>
-              <a:t>3 × 0.7</a:t>
+              <a:t>3 × 0,7</a:t>
             </a:r>
           </a:p>
         </p:txBody>
@@ -4550,7 +4550,7 @@
             <a:pPr algn="ctr"/>
             <a:r>
               <a:rPr lang="en-GB" sz="2000" dirty="0"/>
-              <a:t>2.1</a:t>
+              <a:t>2,1</a:t>
             </a:r>
           </a:p>
         </p:txBody>
@@ -4626,7 +4626,7 @@
           <a:p>
             <a:r>
               <a:rPr lang="en-GB" sz="2000" dirty="0"/>
-              <a:t>0.8 × 4</a:t>
+              <a:t>0,8 × 4</a:t>
             </a:r>
           </a:p>
         </p:txBody>
@@ -4669,7 +4669,7 @@
             <a:pPr algn="ctr"/>
             <a:r>
               <a:rPr lang="en-GB" sz="2000" dirty="0"/>
-              <a:t>3.2</a:t>
+              <a:t>3,2</a:t>
             </a:r>
           </a:p>
         </p:txBody>
@@ -4745,7 +4745,7 @@
           <a:p>
             <a:r>
               <a:rPr lang="en-GB" sz="2000" dirty="0"/>
-              <a:t>1.1 × 6</a:t>
+              <a:t>1,1 × 6</a:t>
             </a:r>
           </a:p>
         </p:txBody>
@@ -4788,7 +4788,7 @@
             <a:pPr algn="ctr"/>
             <a:r>
               <a:rPr lang="en-GB" sz="2000" dirty="0"/>
-              <a:t>6.6</a:t>
+              <a:t>6,6</a:t>
             </a:r>
           </a:p>
         </p:txBody>
@@ -4864,7 +4864,7 @@
           <a:p>
             <a:r>
               <a:rPr lang="en-GB" sz="2000" dirty="0"/>
-              <a:t>2.4 × 2</a:t>
+              <a:t>2,4 × 2</a:t>
             </a:r>
           </a:p>
         </p:txBody>
@@ -4907,7 +4907,7 @@
             <a:pPr algn="ctr"/>
             <a:r>
               <a:rPr lang="en-GB" sz="2000" dirty="0"/>
-              <a:t>4.8</a:t>
+              <a:t>4,8</a:t>
             </a:r>
           </a:p>
         </p:txBody>
@@ -4983,7 +4983,7 @@
           <a:p>
             <a:r>
               <a:rPr lang="en-GB" sz="2000" dirty="0"/>
-              <a:t>3 × 2.6</a:t>
+              <a:t>3 × 2,6</a:t>
             </a:r>
           </a:p>
         </p:txBody>
@@ -5026,7 +5026,7 @@
             <a:pPr algn="ctr"/>
             <a:r>
               <a:rPr lang="en-GB" sz="2000" dirty="0"/>
-              <a:t>7.8</a:t>
+              <a:t>7,8</a:t>
             </a:r>
           </a:p>
         </p:txBody>
@@ -5138,7 +5138,7 @@
           <a:p>
             <a:r>
               <a:rPr lang="en-GB" sz="2000" dirty="0"/>
-              <a:t>0.3 × 0.3</a:t>
+              <a:t>0,3 × 0,3</a:t>
             </a:r>
           </a:p>
         </p:txBody>
@@ -5181,7 +5181,7 @@
             <a:pPr algn="ctr"/>
             <a:r>
               <a:rPr lang="en-GB" sz="2000" dirty="0"/>
-              <a:t>0.09</a:t>
+              <a:t>0,09</a:t>
             </a:r>
           </a:p>
         </p:txBody>
@@ -5257,7 +5257,7 @@
           <a:p>
             <a:r>
               <a:rPr lang="en-GB" sz="2000" dirty="0"/>
-              <a:t>0.5 × 0.7</a:t>
+              <a:t>0,5 × 0,7</a:t>
             </a:r>
           </a:p>
         </p:txBody>
@@ -5300,7 +5300,7 @@
             <a:pPr algn="ctr"/>
             <a:r>
               <a:rPr lang="en-GB" sz="2000" dirty="0"/>
-              <a:t>0.35</a:t>
+              <a:t>0,35</a:t>
             </a:r>
           </a:p>
         </p:txBody>
@@ -5376,7 +5376,7 @@
           <a:p>
             <a:r>
               <a:rPr lang="en-GB" sz="2000" dirty="0"/>
-              <a:t>0.4 × 0.5</a:t>
+              <a:t>0,4 × 0,5</a:t>
             </a:r>
           </a:p>
         </p:txBody>
@@ -5419,7 +5419,7 @@
             <a:pPr algn="ctr"/>
             <a:r>
               <a:rPr lang="en-GB" sz="2000" dirty="0"/>
-              <a:t>0.2</a:t>
+              <a:t>0,2</a:t>
             </a:r>
           </a:p>
         </p:txBody>
@@ -5495,7 +5495,7 @@
           <a:p>
             <a:r>
               <a:rPr lang="en-GB" sz="2000" dirty="0"/>
-              <a:t>1.2 × 0.3</a:t>
+              <a:t>1,2 × 0,3</a:t>
             </a:r>
           </a:p>
         </p:txBody>
@@ -5538,7 +5538,7 @@
             <a:pPr algn="ctr"/>
             <a:r>
               <a:rPr lang="en-GB" sz="2000" dirty="0"/>
-              <a:t>0.36</a:t>
+              <a:t>0,36</a:t>
             </a:r>
           </a:p>
         </p:txBody>
@@ -5614,7 +5614,7 @@
           <a:p>
             <a:r>
               <a:rPr lang="en-GB" sz="2000" dirty="0"/>
-              <a:t>0.4 × 1.6</a:t>
+              <a:t>0,4 × 1,6</a:t>
             </a:r>
           </a:p>
         </p:txBody>
@@ -5657,7 +5657,7 @@
             <a:pPr algn="ctr"/>
             <a:r>
               <a:rPr lang="en-GB" sz="2000" dirty="0"/>
-              <a:t>0.64</a:t>
+              <a:t>0,64</a:t>
             </a:r>
           </a:p>
         </p:txBody>
@@ -5733,7 +5733,7 @@
           <a:p>
             <a:r>
               <a:rPr lang="en-GB" sz="2000" dirty="0"/>
-              <a:t>1.2 × 1.3</a:t>
+              <a:t>1,2 × 1,3</a:t>
             </a:r>
           </a:p>
         </p:txBody>
@@ -5776,7 +5776,7 @@
             <a:pPr algn="ctr"/>
             <a:r>
               <a:rPr lang="en-GB" sz="2000" dirty="0"/>
-              <a:t>1.56</a:t>
+              <a:t>1,56</a:t>
             </a:r>
           </a:p>
         </p:txBody>
@@ -5852,7 +5852,7 @@
           <a:p>
             <a:r>
               <a:rPr lang="en-GB" sz="2000" dirty="0"/>
-              <a:t>2.7 × 1.1</a:t>
+              <a:t>2,7 × 1,1</a:t>
             </a:r>
           </a:p>
         </p:txBody>
@@ -5895,7 +5895,7 @@
             <a:pPr algn="ctr"/>
             <a:r>
               <a:rPr lang="en-GB" sz="2000" dirty="0"/>
-              <a:t>2.97</a:t>
+              <a:t>2,97</a:t>
             </a:r>
           </a:p>
         </p:txBody>
@@ -6007,7 +6007,7 @@
           <a:p>
             <a:r>
               <a:rPr lang="en-GB" sz="2000" dirty="0"/>
-              <a:t>1.2 × 0.7</a:t>
+              <a:t>1,2 × 0,7</a:t>
             </a:r>
           </a:p>
         </p:txBody>
@@ -6050,7 +6050,7 @@
             <a:pPr algn="ctr"/>
             <a:r>
               <a:rPr lang="en-GB" sz="2000" dirty="0"/>
-              <a:t>0.84</a:t>
+              <a:t>0,84</a:t>
             </a:r>
           </a:p>
         </p:txBody>
@@ -6126,7 +6126,7 @@
           <a:p>
             <a:r>
               <a:rPr lang="en-GB" sz="2000" dirty="0"/>
-              <a:t>1.4 × 1.8</a:t>
+              <a:t>1,4 × 1,8</a:t>
             </a:r>
           </a:p>
         </p:txBody>
@@ -6169,7 +6169,7 @@
             <a:pPr algn="ctr"/>
             <a:r>
               <a:rPr lang="en-GB" sz="2000" dirty="0"/>
-              <a:t>2.52</a:t>
+              <a:t>2,52</a:t>
             </a:r>
           </a:p>
         </p:txBody>
@@ -6245,7 +6245,7 @@
           <a:p>
             <a:r>
               <a:rPr lang="en-GB" sz="2000" dirty="0"/>
-              <a:t>0.2 × 0.16</a:t>
+              <a:t>0,2 × 0,16</a:t>
             </a:r>
           </a:p>
         </p:txBody>
@@ -6288,7 +6288,7 @@
             <a:pPr algn="ctr"/>
             <a:r>
               <a:rPr lang="en-GB" sz="2000" dirty="0"/>
-              <a:t>0.032</a:t>
+              <a:t>0,032</a:t>
             </a:r>
           </a:p>
         </p:txBody>
@@ -6364,7 +6364,7 @@
           <a:p>
             <a:r>
               <a:rPr lang="en-GB" sz="2000" dirty="0"/>
-              <a:t>1.6 × 0.05</a:t>
+              <a:t>1,6 × 0,05</a:t>
             </a:r>
           </a:p>
         </p:txBody>
@@ -6407,7 +6407,7 @@
             <a:pPr algn="ctr"/>
             <a:r>
               <a:rPr lang="en-GB" sz="2000" dirty="0"/>
-              <a:t>0.08</a:t>
+              <a:t>0,08</a:t>
             </a:r>
           </a:p>
         </p:txBody>
@@ -6483,7 +6483,7 @@
           <a:p>
             <a:r>
               <a:rPr lang="en-GB" sz="2000" dirty="0"/>
-              <a:t>2.2 × 0.15</a:t>
+              <a:t>2,2 × 0,15</a:t>
             </a:r>
           </a:p>
         </p:txBody>
@@ -6526,7 +6526,7 @@
             <a:pPr algn="ctr"/>
             <a:r>
               <a:rPr lang="en-GB" sz="2000" dirty="0"/>
-              <a:t>0.33</a:t>
+              <a:t>0,33</a:t>
             </a:r>
           </a:p>
         </p:txBody>
@@ -6602,7 +6602,7 @@
           <a:p>
             <a:r>
               <a:rPr lang="en-GB" sz="2000" dirty="0"/>
-              <a:t>1.24 × 0.6</a:t>
+              <a:t>1,24 × 0,6</a:t>
             </a:r>
           </a:p>
         </p:txBody>
@@ -6645,7 +6645,7 @@
             <a:pPr algn="ctr"/>
             <a:r>
               <a:rPr lang="en-GB" sz="2000" dirty="0"/>
-              <a:t>0.744</a:t>
+              <a:t>0,744</a:t>
             </a:r>
           </a:p>
         </p:txBody>
@@ -6721,7 +6721,7 @@
           <a:p>
             <a:r>
               <a:rPr lang="en-GB" sz="2000" dirty="0"/>
-              <a:t>2.21 × 3.5</a:t>
+              <a:t>2,21 × 3,5</a:t>
             </a:r>
           </a:p>
         </p:txBody>
@@ -6764,7 +6764,7 @@
             <a:pPr algn="ctr"/>
             <a:r>
               <a:rPr lang="en-GB" sz="2000" dirty="0"/>
-              <a:t>7.735</a:t>
+              <a:t>7,735</a:t>
             </a:r>
           </a:p>
         </p:txBody>
@@ -8543,7 +8543,7 @@
                 <a:ea typeface="+mn-ea"/>
                 <a:cs typeface="+mn-cs"/>
               </a:rPr>
-              <a:t>Турдуу пикирлер учун ыраазычылык билдиребиз.</a:t>
+              <a:t>Турдуу пикирлер үчүн ыраазычылык билдиребиз.</a:t>
             </a:r>
           </a:p>
           <a:p>
